--- a/docs/PRIDE_Dashboard_시연자료.pptx
+++ b/docs/PRIDE_Dashboard_시연자료.pptx
@@ -7641,7 +7641,7 @@
                 <a:ea typeface="맑은 고딕" pitchFamily="34" charset="-122"/>
                 <a:cs typeface="맑은 고딕" pitchFamily="34" charset="-120"/>
               </a:rPr>
-              <a:t>탭 6종: 홈 / 활동군 상세 / MW /</a:t>
+              <a:t>탭 7종: 홈 / My / 활동군 상세(6종) /</a:t>
             </a:r>
             <a:endParaRPr lang="en-US" sz="1250" dirty="0"/>
           </a:p>
@@ -7662,7 +7662,7 @@
                 <a:ea typeface="맑은 고딕" pitchFamily="34" charset="-122"/>
                 <a:cs typeface="맑은 고딕" pitchFamily="34" charset="-120"/>
               </a:rPr>
-              <a:t>장기성과 / Executive / 시뮬레이터</a:t>
+              <a:t>MW / 성과 플랫폼 / Executive / 시뮬레이터</a:t>
             </a:r>
             <a:endParaRPr lang="en-US" sz="1250" dirty="0"/>
           </a:p>
@@ -13478,7 +13478,7 @@
                 <a:ea typeface="맑은 고딕" pitchFamily="34" charset="-122"/>
                 <a:cs typeface="맑은 고딕" pitchFamily="34" charset="-120"/>
               </a:rPr>
-              <a:t>연차별 활용률 · 기대 vs 실현 · BEP · 미활용 분석 (DEMO 시뮬레이션)</a:t>
+              <a:t>활동군 상세 &gt; 장기 성과관리·확산에서 바로 열림 (단일 진입점) — 연차별 활용률 · BEP · 미활용 분석</a:t>
             </a:r>
             <a:endParaRPr lang="en-US" sz="1250" dirty="0"/>
           </a:p>
